--- a/outputs/Milestone1_Sumukh_S24CSEU0570.pptx
+++ b/outputs/Milestone1_Sumukh_S24CSEU0570.pptx
@@ -861,7 +861,7 @@
           <a:lstStyle/>
           <a:p>
             <a:r>
-              <a:t>The gap table is in data/DATASET_INVENTORY.md. The shared-task property: English train, Hindi/Bengali test.</a:t>
+              <a:t>Headline measured result: English-trained TF-IDF on the Indic pilot gives macro-F1 0.341 and predicts None for 131/150. Gap table: data/DATASET_INVENTORY.md. Pilot is synthetic, development only.</a:t>
             </a:r>
           </a:p>
         </p:txBody>
@@ -1141,7 +1141,7 @@
           <a:lstStyle/>
           <a:p>
             <a:r>
-              <a:t>English CV numbers are optimistic (no document ids, one hashtag cluster). Pilot numbers are development only.</a:t>
+              <a:t>Headline: English-to-Indic zero-shot collapses to majority-class prediction (pilot: synthetic, dev only). English CV numbers are optimistic (no document ids, one hashtag cluster).</a:t>
             </a:r>
           </a:p>
         </p:txBody>
@@ -7236,7 +7236,7 @@
                 <a:latin typeface="Calibri"/>
                 <a:cs typeface="Nirmala UI"/>
               </a:rPr>
-              <a:t>Neutral + off-topic + ambiguous. 202 of 2,047 annotated sentences (9.9%) had no annotator majority.</a:t>
+              <a:t>Neutral + off-topic + ambiguous. 215 of 2,300 annotated sentences (9.3%) had no annotator majority.</a:t>
             </a:r>
           </a:p>
         </p:txBody>
@@ -8684,7 +8684,7 @@
         <p:spPr>
           <a:xfrm>
             <a:off x="502920" y="1417320"/>
-            <a:ext cx="3291840" cy="914400"/>
+            <a:ext cx="3291840" cy="822960"/>
           </a:xfrm>
           <a:prstGeom prst="rect">
             <a:avLst/>
@@ -8741,8 +8741,8 @@
         </p:nvSpPr>
         <p:spPr>
           <a:xfrm>
-            <a:off x="502920" y="2468880"/>
-            <a:ext cx="3291840" cy="822960"/>
+            <a:off x="502920" y="2286000"/>
+            <a:ext cx="3291840" cy="548640"/>
           </a:xfrm>
           <a:prstGeom prst="rect">
             <a:avLst/>
@@ -8777,7 +8777,7 @@
               </a:spcAft>
             </a:pPr>
             <a:r>
-              <a:rPr sz="1700" b="0" i="0">
+              <a:rPr sz="1600" b="0" i="0">
                 <a:solidFill>
                   <a:srgbClr val="5C677D"/>
                 </a:solidFill>
@@ -8797,7 +8797,7 @@
         </p:nvSpPr>
         <p:spPr>
           <a:xfrm>
-            <a:off x="1600200" y="3246120"/>
+            <a:off x="1600200" y="2788920"/>
             <a:ext cx="1097280" cy="685800"/>
           </a:xfrm>
           <a:prstGeom prst="rect">
@@ -8853,8 +8853,8 @@
         </p:nvSpPr>
         <p:spPr>
           <a:xfrm>
-            <a:off x="502920" y="3931920"/>
-            <a:ext cx="3291840" cy="914400"/>
+            <a:off x="502920" y="3520440"/>
+            <a:ext cx="3291840" cy="822960"/>
           </a:xfrm>
           <a:prstGeom prst="rect">
             <a:avLst/>
@@ -8911,8 +8911,8 @@
         </p:nvSpPr>
         <p:spPr>
           <a:xfrm>
-            <a:off x="502920" y="4937760"/>
-            <a:ext cx="3291840" cy="1097280"/>
+            <a:off x="502920" y="4389120"/>
+            <a:ext cx="3291840" cy="822960"/>
           </a:xfrm>
           <a:prstGeom prst="rect">
             <a:avLst/>
@@ -8947,14 +8947,14 @@
               </a:spcAft>
             </a:pPr>
             <a:r>
-              <a:rPr sz="1500" b="0" i="0">
+              <a:rPr sz="1400" b="0" i="0">
                 <a:solidFill>
                   <a:srgbClr val="5C677D"/>
                 </a:solidFill>
                 <a:latin typeface="Calibri"/>
                 <a:cs typeface="Nirmala UI"/>
               </a:rPr>
-              <a:t>hidden test set: code-mixing, spelling variation, negation, implicit stance</a:t>
+              <a:t>hidden test: code-mixing, spelling variation, negation, implicit stance</a:t>
             </a:r>
           </a:p>
         </p:txBody>
@@ -8969,7 +8969,7 @@
         </p:nvGraphicFramePr>
         <p:xfrm>
           <a:off x="4206240" y="1417320"/>
-          <a:ext cx="7452360" cy="3852664"/>
+          <a:ext cx="7452360" cy="3006852"/>
         </p:xfrm>
         <a:graphic>
           <a:graphicData uri="http://schemas.openxmlformats.org/drawingml/2006/table">
@@ -8983,14 +8983,14 @@
                 <a:gridCol w="1656080"/>
                 <a:gridCol w="1821688"/>
               </a:tblGrid>
-              <a:tr h="605535">
+              <a:tr h="347472">
                 <a:tc>
                   <a:txBody>
                     <a:bodyPr wrap="square"/>
                     <a:lstStyle/>
                     <a:p>
                       <a:r>
-                        <a:rPr sz="1600" b="1" i="0">
+                        <a:rPr sz="1500" b="1" i="0">
                           <a:solidFill>
                             <a:srgbClr val="FFFFFF"/>
                           </a:solidFill>
@@ -9013,7 +9013,7 @@
                     <a:lstStyle/>
                     <a:p>
                       <a:r>
-                        <a:rPr sz="1600" b="1" i="0">
+                        <a:rPr sz="1500" b="1" i="0">
                           <a:solidFill>
                             <a:srgbClr val="FFFFFF"/>
                           </a:solidFill>
@@ -9036,7 +9036,7 @@
                     <a:lstStyle/>
                     <a:p>
                       <a:r>
-                        <a:rPr sz="1600" b="1" i="0">
+                        <a:rPr sz="1500" b="1" i="0">
                           <a:solidFill>
                             <a:srgbClr val="FFFFFF"/>
                           </a:solidFill>
@@ -9059,7 +9059,7 @@
                     <a:lstStyle/>
                     <a:p>
                       <a:r>
-                        <a:rPr sz="1600" b="1" i="0">
+                        <a:rPr sz="1500" b="1" i="0">
                           <a:solidFill>
                             <a:srgbClr val="FFFFFF"/>
                           </a:solidFill>
@@ -9077,14 +9077,14 @@
                   </a:tcPr>
                 </a:tc>
               </a:tr>
-              <a:tr h="605535">
+              <a:tr h="347472">
                 <a:tc>
                   <a:txBody>
                     <a:bodyPr wrap="square"/>
                     <a:lstStyle/>
                     <a:p>
                       <a:r>
-                        <a:rPr sz="1600" b="1" i="0">
+                        <a:rPr sz="1500" b="1" i="0">
                           <a:solidFill>
                             <a:srgbClr val="1B263B"/>
                           </a:solidFill>
@@ -9107,7 +9107,7 @@
                     <a:lstStyle/>
                     <a:p>
                       <a:r>
-                        <a:rPr sz="1600" b="0" i="0">
+                        <a:rPr sz="1500" b="0" i="0">
                           <a:solidFill>
                             <a:srgbClr val="1B263B"/>
                           </a:solidFill>
@@ -9130,7 +9130,7 @@
                     <a:lstStyle/>
                     <a:p>
                       <a:r>
-                        <a:rPr sz="1600" b="0" i="0">
+                        <a:rPr sz="1500" b="0" i="0">
                           <a:solidFill>
                             <a:srgbClr val="1B263B"/>
                           </a:solidFill>
@@ -9153,7 +9153,7 @@
                     <a:lstStyle/>
                     <a:p>
                       <a:r>
-                        <a:rPr sz="1600" b="0" i="0">
+                        <a:rPr sz="1500" b="0" i="0">
                           <a:solidFill>
                             <a:srgbClr val="1B263B"/>
                           </a:solidFill>
@@ -9171,14 +9171,14 @@
                   </a:tcPr>
                 </a:tc>
               </a:tr>
-              <a:tr h="357631">
+              <a:tr h="347472">
                 <a:tc>
                   <a:txBody>
                     <a:bodyPr wrap="square"/>
                     <a:lstStyle/>
                     <a:p>
                       <a:r>
-                        <a:rPr sz="1600" b="1" i="0">
+                        <a:rPr sz="1500" b="1" i="0">
                           <a:solidFill>
                             <a:srgbClr val="1B263B"/>
                           </a:solidFill>
@@ -9201,7 +9201,7 @@
                     <a:lstStyle/>
                     <a:p>
                       <a:r>
-                        <a:rPr sz="1600" b="0" i="0">
+                        <a:rPr sz="1500" b="0" i="0">
                           <a:solidFill>
                             <a:srgbClr val="1B263B"/>
                           </a:solidFill>
@@ -9224,7 +9224,7 @@
                     <a:lstStyle/>
                     <a:p>
                       <a:r>
-                        <a:rPr sz="1600" b="0" i="0">
+                        <a:rPr sz="1500" b="0" i="0">
                           <a:solidFill>
                             <a:srgbClr val="1B263B"/>
                           </a:solidFill>
@@ -9247,7 +9247,7 @@
                     <a:lstStyle/>
                     <a:p>
                       <a:r>
-                        <a:rPr sz="1600" b="0" i="0">
+                        <a:rPr sz="1500" b="0" i="0">
                           <a:solidFill>
                             <a:srgbClr val="1B263B"/>
                           </a:solidFill>
@@ -9265,14 +9265,14 @@
                   </a:tcPr>
                 </a:tc>
               </a:tr>
-              <a:tr h="357631">
+              <a:tr h="347472">
                 <a:tc>
                   <a:txBody>
                     <a:bodyPr wrap="square"/>
                     <a:lstStyle/>
                     <a:p>
                       <a:r>
-                        <a:rPr sz="1600" b="1" i="0">
+                        <a:rPr sz="1500" b="1" i="0">
                           <a:solidFill>
                             <a:srgbClr val="1B263B"/>
                           </a:solidFill>
@@ -9295,7 +9295,7 @@
                     <a:lstStyle/>
                     <a:p>
                       <a:r>
-                        <a:rPr sz="1600" b="0" i="0">
+                        <a:rPr sz="1500" b="0" i="0">
                           <a:solidFill>
                             <a:srgbClr val="1B263B"/>
                           </a:solidFill>
@@ -9318,7 +9318,7 @@
                     <a:lstStyle/>
                     <a:p>
                       <a:r>
-                        <a:rPr sz="1600" b="0" i="0">
+                        <a:rPr sz="1500" b="0" i="0">
                           <a:solidFill>
                             <a:srgbClr val="1B263B"/>
                           </a:solidFill>
@@ -9341,7 +9341,7 @@
                     <a:lstStyle/>
                     <a:p>
                       <a:r>
-                        <a:rPr sz="1600" b="0" i="0">
+                        <a:rPr sz="1500" b="0" i="0">
                           <a:solidFill>
                             <a:srgbClr val="1B263B"/>
                           </a:solidFill>
@@ -9359,14 +9359,14 @@
                   </a:tcPr>
                 </a:tc>
               </a:tr>
-              <a:tr h="357631">
+              <a:tr h="347472">
                 <a:tc>
                   <a:txBody>
                     <a:bodyPr wrap="square"/>
                     <a:lstStyle/>
                     <a:p>
                       <a:r>
-                        <a:rPr sz="1600" b="1" i="0">
+                        <a:rPr sz="1500" b="1" i="0">
                           <a:solidFill>
                             <a:srgbClr val="1B263B"/>
                           </a:solidFill>
@@ -9389,7 +9389,7 @@
                     <a:lstStyle/>
                     <a:p>
                       <a:r>
-                        <a:rPr sz="1600" b="0" i="0">
+                        <a:rPr sz="1500" b="0" i="0">
                           <a:solidFill>
                             <a:srgbClr val="1B263B"/>
                           </a:solidFill>
@@ -9412,7 +9412,7 @@
                     <a:lstStyle/>
                     <a:p>
                       <a:r>
-                        <a:rPr sz="1600" b="0" i="0">
+                        <a:rPr sz="1500" b="0" i="0">
                           <a:solidFill>
                             <a:srgbClr val="1B263B"/>
                           </a:solidFill>
@@ -9435,7 +9435,7 @@
                     <a:lstStyle/>
                     <a:p>
                       <a:r>
-                        <a:rPr sz="1600" b="0" i="0">
+                        <a:rPr sz="1500" b="0" i="0">
                           <a:solidFill>
                             <a:srgbClr val="1B263B"/>
                           </a:solidFill>
@@ -9453,14 +9453,14 @@
                   </a:tcPr>
                 </a:tc>
               </a:tr>
-              <a:tr h="357631">
+              <a:tr h="347472">
                 <a:tc>
                   <a:txBody>
                     <a:bodyPr wrap="square"/>
                     <a:lstStyle/>
                     <a:p>
                       <a:r>
-                        <a:rPr sz="1600" b="1" i="0">
+                        <a:rPr sz="1500" b="1" i="0">
                           <a:solidFill>
                             <a:srgbClr val="1B263B"/>
                           </a:solidFill>
@@ -9483,7 +9483,7 @@
                     <a:lstStyle/>
                     <a:p>
                       <a:r>
-                        <a:rPr sz="1600" b="0" i="0">
+                        <a:rPr sz="1500" b="0" i="0">
                           <a:solidFill>
                             <a:srgbClr val="1B263B"/>
                           </a:solidFill>
@@ -9506,7 +9506,7 @@
                     <a:lstStyle/>
                     <a:p>
                       <a:r>
-                        <a:rPr sz="1600" b="0" i="0">
+                        <a:rPr sz="1500" b="0" i="0">
                           <a:solidFill>
                             <a:srgbClr val="1B263B"/>
                           </a:solidFill>
@@ -9529,7 +9529,7 @@
                     <a:lstStyle/>
                     <a:p>
                       <a:r>
-                        <a:rPr sz="1600" b="0" i="0">
+                        <a:rPr sz="1500" b="0" i="0">
                           <a:solidFill>
                             <a:srgbClr val="1B263B"/>
                           </a:solidFill>
@@ -9547,14 +9547,14 @@
                   </a:tcPr>
                 </a:tc>
               </a:tr>
-              <a:tr h="605535">
+              <a:tr h="574548">
                 <a:tc>
                   <a:txBody>
                     <a:bodyPr wrap="square"/>
                     <a:lstStyle/>
                     <a:p>
                       <a:r>
-                        <a:rPr sz="1600" b="1" i="0">
+                        <a:rPr sz="1500" b="1" i="0">
                           <a:solidFill>
                             <a:srgbClr val="1B263B"/>
                           </a:solidFill>
@@ -9577,7 +9577,7 @@
                     <a:lstStyle/>
                     <a:p>
                       <a:r>
-                        <a:rPr sz="1600" b="0" i="0">
+                        <a:rPr sz="1500" b="0" i="0">
                           <a:solidFill>
                             <a:srgbClr val="1B263B"/>
                           </a:solidFill>
@@ -9600,7 +9600,7 @@
                     <a:lstStyle/>
                     <a:p>
                       <a:r>
-                        <a:rPr sz="1600" b="0" i="0">
+                        <a:rPr sz="1500" b="0" i="0">
                           <a:solidFill>
                             <a:srgbClr val="1B263B"/>
                           </a:solidFill>
@@ -9623,7 +9623,7 @@
                     <a:lstStyle/>
                     <a:p>
                       <a:r>
-                        <a:rPr sz="1600" b="0" i="0">
+                        <a:rPr sz="1500" b="0" i="0">
                           <a:solidFill>
                             <a:srgbClr val="1B263B"/>
                           </a:solidFill>
@@ -9641,14 +9641,14 @@
                   </a:tcPr>
                 </a:tc>
               </a:tr>
-              <a:tr h="605535">
+              <a:tr h="347472">
                 <a:tc>
                   <a:txBody>
                     <a:bodyPr wrap="square"/>
                     <a:lstStyle/>
                     <a:p>
                       <a:r>
-                        <a:rPr sz="1600" b="1" i="0">
+                        <a:rPr sz="1500" b="1" i="0">
                           <a:solidFill>
                             <a:srgbClr val="1B263B"/>
                           </a:solidFill>
@@ -9671,7 +9671,7 @@
                     <a:lstStyle/>
                     <a:p>
                       <a:r>
-                        <a:rPr sz="1600" b="0" i="0">
+                        <a:rPr sz="1500" b="0" i="0">
                           <a:solidFill>
                             <a:srgbClr val="1B263B"/>
                           </a:solidFill>
@@ -9694,7 +9694,7 @@
                     <a:lstStyle/>
                     <a:p>
                       <a:r>
-                        <a:rPr sz="1600" b="0" i="0">
+                        <a:rPr sz="1500" b="0" i="0">
                           <a:solidFill>
                             <a:srgbClr val="1B263B"/>
                           </a:solidFill>
@@ -9717,7 +9717,7 @@
                     <a:lstStyle/>
                     <a:p>
                       <a:r>
-                        <a:rPr sz="1600" b="0" i="0">
+                        <a:rPr sz="1500" b="0" i="0">
                           <a:solidFill>
                             <a:srgbClr val="1B263B"/>
                           </a:solidFill>
@@ -9747,15 +9747,19 @@
         </p:nvSpPr>
         <p:spPr>
           <a:xfrm>
-            <a:off x="4206240" y="5669280"/>
-            <a:ext cx="7452360" cy="640080"/>
+            <a:off x="502920" y="5349240"/>
+            <a:ext cx="11155680" cy="1005840"/>
           </a:xfrm>
           <a:prstGeom prst="rect">
             <a:avLst/>
           </a:prstGeom>
-          <a:noFill/>
-          <a:ln>
-            <a:noFill/>
+          <a:solidFill>
+            <a:srgbClr val="FDECE8"/>
+          </a:solidFill>
+          <a:ln w="19050">
+            <a:solidFill>
+              <a:srgbClr val="E76F51"/>
+            </a:solidFill>
           </a:ln>
           <a:effectLst/>
         </p:spPr>
@@ -9774,7 +9778,7 @@
           </a:fontRef>
         </p:style>
         <p:txBody>
-          <a:bodyPr rtlCol="0" anchor="t" wrap="square" lIns="0" rIns="0"/>
+          <a:bodyPr rtlCol="0" anchor="ctr" wrap="square" lIns="137160" rIns="137160"/>
           <a:lstStyle/>
           <a:p>
             <a:pPr algn="l">
@@ -9783,14 +9787,34 @@
               </a:spcAft>
             </a:pPr>
             <a:r>
-              <a:rPr sz="1700" b="1" i="0">
-                <a:solidFill>
-                  <a:srgbClr val="1F2A44"/>
-                </a:solidFill>
-                <a:latin typeface="Calibri"/>
-                <a:cs typeface="Nirmala UI"/>
-              </a:rPr>
-              <a:t>Cross-lingual transfer problem: target-correct labels are English, evaluation is Indic.</a:t>
+              <a:rPr sz="1500" b="1" i="0">
+                <a:solidFill>
+                  <a:srgbClr val="E76F51"/>
+                </a:solidFill>
+                <a:latin typeface="Calibri"/>
+                <a:cs typeface="Nirmala UI"/>
+              </a:rPr>
+              <a:t>Measured, not assumed: </a:t>
+            </a:r>
+            <a:r>
+              <a:rPr sz="1500" b="0" i="0">
+                <a:solidFill>
+                  <a:srgbClr val="1B263B"/>
+                </a:solidFill>
+                <a:latin typeface="Calibri"/>
+                <a:cs typeface="Nirmala UI"/>
+              </a:rPr>
+              <a:t>English-trained TF-IDF on the Indic pilot reaches macro-F1 0.341 (floor 0.167) and predicts None for 131 of 150: cross-lingual transfer collapses to majority-class prediction, so in-language data and Indic-specific models are needed. 58.9% of Against vocabulary also appears in Favour: not simple text classification. </a:t>
+            </a:r>
+            <a:r>
+              <a:rPr sz="1500" b="0" i="1">
+                <a:solidFill>
+                  <a:srgbClr val="5C677D"/>
+                </a:solidFill>
+                <a:latin typeface="Calibri"/>
+                <a:cs typeface="Nirmala UI"/>
+              </a:rPr>
+              <a:t>(Pilot: synthetic, development only.)</a:t>
             </a:r>
           </a:p>
         </p:txBody>
@@ -10278,7 +10302,7 @@
                 <a:latin typeface="Calibri"/>
                 <a:cs typeface="Nirmala UI"/>
               </a:rPr>
-              <a:t>Ties dropped: </a:t>
+              <a:t>No annotator majority: </a:t>
             </a:r>
             <a:r>
               <a:rPr sz="1800" b="0" i="0">
@@ -10288,7 +10312,7 @@
                 <a:latin typeface="Calibri"/>
                 <a:cs typeface="Nirmala UI"/>
               </a:rPr>
-              <a:t>202 (9.9% of GWSD)</a:t>
+              <a:t>215 of 2,300 GWSD (9.3%); 202 remain after dedup, dropped</a:t>
             </a:r>
           </a:p>
           <a:p>
@@ -12334,7 +12358,7 @@
                 <a:latin typeface="Calibri"/>
                 <a:cs typeface="Nirmala UI"/>
               </a:rPr>
-              <a:t>IndicXNLI: MuRIL beats XLM-R, mBERT and IndicBERT on Indic languages; English + Indic training is best. Indic words stay whole.</a:t>
+              <a:t>IndicXNLI: MuRIL beats XLM-R, mBERT and IndicBERT on Indic languages; English + Indic training is best. Pretrained with transliterated text.</a:t>
             </a:r>
           </a:p>
         </p:txBody>
@@ -12829,8 +12853,8 @@
         </p:blipFill>
         <p:spPr>
           <a:xfrm>
-            <a:off x="411480" y="1371600"/>
-            <a:ext cx="6126480" cy="3315506"/>
+            <a:off x="411480" y="1325880"/>
+            <a:ext cx="5394960" cy="2919625"/>
           </a:xfrm>
           <a:prstGeom prst="rect">
             <a:avLst/>
@@ -12853,8 +12877,8 @@
         </p:blipFill>
         <p:spPr>
           <a:xfrm>
-            <a:off x="6903720" y="1371600"/>
-            <a:ext cx="3429000" cy="3033346"/>
+            <a:off x="5943600" y="1325880"/>
+            <a:ext cx="2926080" cy="2588455"/>
           </a:xfrm>
           <a:prstGeom prst="rect">
             <a:avLst/>
@@ -12869,8 +12893,8 @@
         </p:nvSpPr>
         <p:spPr>
           <a:xfrm>
-            <a:off x="10378440" y="1417320"/>
-            <a:ext cx="1463040" cy="2926080"/>
+            <a:off x="9052560" y="1463040"/>
+            <a:ext cx="2743200" cy="2194560"/>
           </a:xfrm>
           <a:prstGeom prst="rect">
             <a:avLst/>
@@ -12905,14 +12929,14 @@
               </a:spcAft>
             </a:pPr>
             <a:r>
-              <a:rPr sz="1500" b="1" i="0">
+              <a:rPr sz="1700" b="1" i="0">
                 <a:solidFill>
                   <a:srgbClr val="1F2A44"/>
                 </a:solidFill>
                 <a:latin typeface="Calibri"/>
                 <a:cs typeface="Nirmala UI"/>
               </a:rPr>
-              <a:t>Best: word+char LogReg</a:t>
+              <a:t>Best (English CV):</a:t>
             </a:r>
           </a:p>
           <a:p>
@@ -12922,13 +12946,30 @@
               </a:spcAft>
             </a:pPr>
             <a:r>
-              <a:rPr sz="1500" b="1" i="0">
+              <a:rPr sz="1700" b="1" i="0">
                 <a:solidFill>
                   <a:srgbClr val="1F2A44"/>
                 </a:solidFill>
                 <a:latin typeface="Calibri"/>
                 <a:cs typeface="Nirmala UI"/>
               </a:rPr>
+              <a:t>word+char LogReg</a:t>
+            </a:r>
+          </a:p>
+          <a:p>
+            <a:pPr algn="l">
+              <a:spcAft>
+                <a:spcPts val="400"/>
+              </a:spcAft>
+            </a:pPr>
+            <a:r>
+              <a:rPr sz="1700" b="1" i="0">
+                <a:solidFill>
+                  <a:srgbClr val="1F2A44"/>
+                </a:solidFill>
+                <a:latin typeface="Calibri"/>
+                <a:cs typeface="Nirmala UI"/>
+              </a:rPr>
               <a:t>macro-F1 0.613</a:t>
             </a:r>
           </a:p>
@@ -12939,7 +12980,7 @@
               </a:spcAft>
             </a:pPr>
             <a:r>
-              <a:rPr sz="1500" b="1" i="0">
+              <a:rPr sz="1700" b="1" i="0">
                 <a:solidFill>
                   <a:srgbClr val="1F2A44"/>
                 </a:solidFill>
@@ -12959,8 +13000,88 @@
         </p:nvSpPr>
         <p:spPr>
           <a:xfrm>
-            <a:off x="502920" y="4617720"/>
-            <a:ext cx="11155680" cy="1737360"/>
+            <a:off x="502920" y="4389120"/>
+            <a:ext cx="11155680" cy="1188720"/>
+          </a:xfrm>
+          <a:prstGeom prst="rect">
+            <a:avLst/>
+          </a:prstGeom>
+          <a:solidFill>
+            <a:srgbClr val="FDECE8"/>
+          </a:solidFill>
+          <a:ln w="19050">
+            <a:solidFill>
+              <a:srgbClr val="E76F51"/>
+            </a:solidFill>
+          </a:ln>
+          <a:effectLst/>
+        </p:spPr>
+        <p:style>
+          <a:lnRef idx="1">
+            <a:schemeClr val="accent1"/>
+          </a:lnRef>
+          <a:fillRef idx="3">
+            <a:schemeClr val="accent1"/>
+          </a:fillRef>
+          <a:effectRef idx="2">
+            <a:schemeClr val="accent1"/>
+          </a:effectRef>
+          <a:fontRef idx="minor">
+            <a:schemeClr val="lt1"/>
+          </a:fontRef>
+        </p:style>
+        <p:txBody>
+          <a:bodyPr rtlCol="0" anchor="ctr" wrap="square" lIns="137160" rIns="137160"/>
+          <a:lstStyle/>
+          <a:p>
+            <a:pPr algn="l">
+              <a:spcAft>
+                <a:spcPts val="400"/>
+              </a:spcAft>
+            </a:pPr>
+            <a:r>
+              <a:rPr sz="1700" b="1" i="0">
+                <a:solidFill>
+                  <a:srgbClr val="E76F51"/>
+                </a:solidFill>
+                <a:latin typeface="Calibri"/>
+                <a:cs typeface="Nirmala UI"/>
+              </a:rPr>
+              <a:t>Headline finding: </a:t>
+            </a:r>
+            <a:r>
+              <a:rPr sz="1700" b="0" i="0">
+                <a:solidFill>
+                  <a:srgbClr val="1B263B"/>
+                </a:solidFill>
+                <a:latin typeface="Calibri"/>
+                <a:cs typeface="Nirmala UI"/>
+              </a:rPr>
+              <a:t>English to Indic zero-shot collapses: macro-F1 0.341 vs floor 0.167, predicting None for 131 of 150 comments. With 58.9% of Against vocabulary also in Favour, this is not simple text classification. </a:t>
+            </a:r>
+            <a:r>
+              <a:rPr sz="1700" b="0" i="1">
+                <a:solidFill>
+                  <a:srgbClr val="5C677D"/>
+                </a:solidFill>
+                <a:latin typeface="Calibri"/>
+                <a:cs typeface="Nirmala UI"/>
+              </a:rPr>
+              <a:t>(Pilot: synthetic, dev only; not comparable to official results.)</a:t>
+            </a:r>
+          </a:p>
+        </p:txBody>
+      </p:sp>
+      <p:sp>
+        <p:nvSpPr>
+          <p:cNvPr id="10" name="Rectangle 9"/>
+          <p:cNvSpPr/>
+          <p:nvPr/>
+        </p:nvSpPr>
+        <p:spPr>
+          <a:xfrm>
+            <a:off x="502920" y="5669280"/>
+            <a:ext cx="11155680" cy="731520"/>
           </a:xfrm>
           <a:prstGeom prst="rect">
             <a:avLst/>
@@ -12991,11 +13112,11 @@
           <a:p>
             <a:pPr algn="l">
               <a:spcAft>
-                <a:spcPts val="500"/>
-              </a:spcAft>
-            </a:pPr>
-            <a:r>
-              <a:rPr sz="1600" b="1" i="0">
+                <a:spcPts val="200"/>
+              </a:spcAft>
+            </a:pPr>
+            <a:r>
+              <a:rPr sz="1400" b="1" i="0">
                 <a:solidFill>
                   <a:srgbClr val="1B263B"/>
                 </a:solidFill>
@@ -13005,24 +13126,24 @@
               <a:t>Runs today: </a:t>
             </a:r>
             <a:r>
-              <a:rPr sz="1600" b="0" i="0">
+              <a:rPr sz="1400" b="0" i="0">
                 <a:solidFill>
                   <a:srgbClr val="1B263B"/>
                 </a:solidFill>
                 <a:latin typeface="Calibri"/>
                 <a:cs typeface="Nirmala UI"/>
               </a:rPr>
-              <a:t>loader + validation gate, preprocessing, EDA, TF-IDF baselines, self-checks</a:t>
+              <a:t>loader + validation gate, preprocessing, EDA, TF-IDF baselines, self-checks.</a:t>
             </a:r>
           </a:p>
           <a:p>
             <a:pPr algn="l">
               <a:spcAft>
-                <a:spcPts val="500"/>
-              </a:spcAft>
-            </a:pPr>
-            <a:r>
-              <a:rPr sz="1600" b="1" i="0">
+                <a:spcPts val="200"/>
+              </a:spcAft>
+            </a:pPr>
+            <a:r>
+              <a:rPr sz="1400" b="1" i="0">
                 <a:solidFill>
                   <a:srgbClr val="1B263B"/>
                 </a:solidFill>
@@ -13032,7 +13153,7 @@
               <a:t>Error analysis: </a:t>
             </a:r>
             <a:r>
-              <a:rPr sz="1600" b="0" i="0">
+              <a:rPr sz="1400" b="0" i="0">
                 <a:solidFill>
                   <a:srgbClr val="1B263B"/>
                 </a:solidFill>
@@ -13040,33 +13161,6 @@
                 <a:cs typeface="Nirmala UI"/>
               </a:rPr>
               <a:t>largest confusion is true None predicted Favour (286): factual sentences with no opinion marker. Against recall 0.54.</a:t>
-            </a:r>
-          </a:p>
-          <a:p>
-            <a:pPr algn="l">
-              <a:spcAft>
-                <a:spcPts val="500"/>
-              </a:spcAft>
-            </a:pPr>
-            <a:r>
-              <a:rPr sz="1600" b="1" i="0">
-                <a:solidFill>
-                  <a:srgbClr val="E76F51"/>
-                </a:solidFill>
-                <a:latin typeface="Calibri"/>
-                <a:cs typeface="Nirmala UI"/>
-              </a:rPr>
-              <a:t>English to Indic pilot (dev only, synthetic): </a:t>
-            </a:r>
-            <a:r>
-              <a:rPr sz="1600" b="0" i="0">
-                <a:solidFill>
-                  <a:srgbClr val="1B263B"/>
-                </a:solidFill>
-                <a:latin typeface="Calibri"/>
-                <a:cs typeface="Nirmala UI"/>
-              </a:rPr>
-              <a:t>macro-F1 0.341, predicts None for 131 of 150; floor 0.167. Not comparable to official results.</a:t>
             </a:r>
           </a:p>
         </p:txBody>

--- a/outputs/Milestone1_Sumukh_S24CSEU0570.pptx
+++ b/outputs/Milestone1_Sumukh_S24CSEU0570.pptx
@@ -4381,8 +4381,8 @@
         </p:nvSpPr>
         <p:spPr>
           <a:xfrm>
-            <a:off x="731520" y="4754880"/>
-            <a:ext cx="7315200" cy="1280160"/>
+            <a:off x="731520" y="4434840"/>
+            <a:ext cx="3291840" cy="2011680"/>
           </a:xfrm>
           <a:prstGeom prst="rect">
             <a:avLst/>
@@ -4417,7 +4417,7 @@
               </a:spcAft>
             </a:pPr>
             <a:r>
-              <a:rPr sz="2000" b="0" i="0">
+              <a:rPr sz="1700" b="0" i="0">
                 <a:solidFill>
                   <a:srgbClr val="FFFFFF"/>
                 </a:solidFill>
@@ -4434,13 +4434,103 @@
               </a:spcAft>
             </a:pPr>
             <a:r>
-              <a:rPr sz="2000" b="0" i="0">
+              <a:rPr sz="1700" b="0" i="0">
                 <a:solidFill>
                   <a:srgbClr val="FFFFFF"/>
                 </a:solidFill>
                 <a:latin typeface="Calibri"/>
                 <a:cs typeface="Nirmala UI"/>
               </a:rPr>
+              <a:t>Neya Tripathi  |  S24CSEU0609</a:t>
+            </a:r>
+          </a:p>
+          <a:p>
+            <a:pPr algn="l">
+              <a:spcAft>
+                <a:spcPts val="400"/>
+              </a:spcAft>
+            </a:pPr>
+            <a:r>
+              <a:rPr sz="1700" b="0" i="0">
+                <a:solidFill>
+                  <a:srgbClr val="FFFFFF"/>
+                </a:solidFill>
+                <a:latin typeface="Calibri"/>
+                <a:cs typeface="Nirmala UI"/>
+              </a:rPr>
+              <a:t>Aditya Goel  |  S24CSEU0614</a:t>
+            </a:r>
+          </a:p>
+          <a:p>
+            <a:pPr algn="l">
+              <a:spcAft>
+                <a:spcPts val="400"/>
+              </a:spcAft>
+            </a:pPr>
+            <a:r>
+              <a:rPr sz="1700" b="0" i="0">
+                <a:solidFill>
+                  <a:srgbClr val="FFFFFF"/>
+                </a:solidFill>
+                <a:latin typeface="Calibri"/>
+                <a:cs typeface="Nirmala UI"/>
+              </a:rPr>
+              <a:t>Kushika Mishra  |  S24CSEU0652</a:t>
+            </a:r>
+          </a:p>
+        </p:txBody>
+      </p:sp>
+      <p:sp>
+        <p:nvSpPr>
+          <p:cNvPr id="7" name="Rectangle 6"/>
+          <p:cNvSpPr/>
+          <p:nvPr/>
+        </p:nvSpPr>
+        <p:spPr>
+          <a:xfrm>
+            <a:off x="4297680" y="4434840"/>
+            <a:ext cx="3383280" cy="2011680"/>
+          </a:xfrm>
+          <a:prstGeom prst="rect">
+            <a:avLst/>
+          </a:prstGeom>
+          <a:noFill/>
+          <a:ln>
+            <a:noFill/>
+          </a:ln>
+          <a:effectLst/>
+        </p:spPr>
+        <p:style>
+          <a:lnRef idx="1">
+            <a:schemeClr val="accent1"/>
+          </a:lnRef>
+          <a:fillRef idx="3">
+            <a:schemeClr val="accent1"/>
+          </a:fillRef>
+          <a:effectRef idx="2">
+            <a:schemeClr val="accent1"/>
+          </a:effectRef>
+          <a:fontRef idx="minor">
+            <a:schemeClr val="lt1"/>
+          </a:fontRef>
+        </p:style>
+        <p:txBody>
+          <a:bodyPr rtlCol="0" anchor="t" wrap="square" lIns="0" rIns="0"/>
+          <a:lstStyle/>
+          <a:p>
+            <a:pPr algn="l">
+              <a:spcAft>
+                <a:spcPts val="400"/>
+              </a:spcAft>
+            </a:pPr>
+            <a:r>
+              <a:rPr sz="1700" b="0" i="0">
+                <a:solidFill>
+                  <a:srgbClr val="C9D3E3"/>
+                </a:solidFill>
+                <a:latin typeface="Calibri"/>
+                <a:cs typeface="Nirmala UI"/>
+              </a:rPr>
               <a:t>B.Tech CSE, Bennett University</a:t>
             </a:r>
           </a:p>
@@ -4451,9 +4541,9 @@
               </a:spcAft>
             </a:pPr>
             <a:r>
-              <a:rPr sz="2000" b="0" i="0">
-                <a:solidFill>
-                  <a:srgbClr val="FFFFFF"/>
+              <a:rPr sz="1700" b="0" i="0">
+                <a:solidFill>
+                  <a:srgbClr val="C9D3E3"/>
                 </a:solidFill>
                 <a:latin typeface="Calibri"/>
                 <a:cs typeface="Nirmala UI"/>
@@ -4465,7 +4555,7 @@
       </p:sp>
       <p:sp>
         <p:nvSpPr>
-          <p:cNvPr id="7" name="Rectangle 6"/>
+          <p:cNvPr id="8" name="Rectangle 7"/>
           <p:cNvSpPr/>
           <p:nvPr/>
         </p:nvSpPr>
@@ -4700,7 +4790,7 @@
                 <a:latin typeface="Calibri"/>
                 <a:cs typeface="Nirmala UI"/>
               </a:rPr>
-              <a:t>Sumukh Gupta  |  S24CSEU0570  |  CSET346 NLP  |  Milestone 1</a:t>
+              <a:t>Sumukh Gupta, Neya Tripathi, Aditya Goel, Kushika Mishra  |  CSET346 NLP  |  Milestone 1</a:t>
             </a:r>
           </a:p>
         </p:txBody>
@@ -5409,7 +5499,7 @@
                 <a:latin typeface="Calibri"/>
                 <a:cs typeface="Nirmala UI"/>
               </a:rPr>
-              <a:t>Sumukh Gupta  |  S24CSEU0570  |  CSET346 NLP  |  Milestone 1</a:t>
+              <a:t>Sumukh Gupta, Neya Tripathi, Aditya Goel, Kushika Mishra  |  CSET346 NLP  |  Milestone 1</a:t>
             </a:r>
           </a:p>
         </p:txBody>
@@ -6557,7 +6647,7 @@
                 <a:latin typeface="Calibri"/>
                 <a:cs typeface="Nirmala UI"/>
               </a:rPr>
-              <a:t>Sumukh Gupta  |  S24CSEU0570  |  CSET346 NLP  |  Milestone 1</a:t>
+              <a:t>Sumukh Gupta, Neya Tripathi, Aditya Goel, Kushika Mishra  |  CSET346 NLP  |  Milestone 1</a:t>
             </a:r>
           </a:p>
         </p:txBody>
@@ -7536,7 +7626,7 @@
                 <a:latin typeface="Calibri"/>
                 <a:cs typeface="Nirmala UI"/>
               </a:rPr>
-              <a:t>Sumukh Gupta  |  S24CSEU0570  |  CSET346 NLP  |  Milestone 1</a:t>
+              <a:t>Sumukh Gupta, Neya Tripathi, Aditya Goel, Kushika Mishra  |  CSET346 NLP  |  Milestone 1</a:t>
             </a:r>
           </a:p>
         </p:txBody>
@@ -8614,7 +8704,7 @@
                 <a:latin typeface="Calibri"/>
                 <a:cs typeface="Nirmala UI"/>
               </a:rPr>
-              <a:t>Sumukh Gupta  |  S24CSEU0570  |  CSET346 NLP  |  Milestone 1</a:t>
+              <a:t>Sumukh Gupta, Neya Tripathi, Aditya Goel, Kushika Mishra  |  CSET346 NLP  |  Milestone 1</a:t>
             </a:r>
           </a:p>
         </p:txBody>
@@ -10000,7 +10090,7 @@
                 <a:latin typeface="Calibri"/>
                 <a:cs typeface="Nirmala UI"/>
               </a:rPr>
-              <a:t>Sumukh Gupta  |  S24CSEU0570  |  CSET346 NLP  |  Milestone 1</a:t>
+              <a:t>Sumukh Gupta, Neya Tripathi, Aditya Goel, Kushika Mishra  |  CSET346 NLP  |  Milestone 1</a:t>
             </a:r>
           </a:p>
         </p:txBody>
@@ -10608,7 +10698,7 @@
                 <a:latin typeface="Calibri"/>
                 <a:cs typeface="Nirmala UI"/>
               </a:rPr>
-              <a:t>Sumukh Gupta  |  S24CSEU0570  |  CSET346 NLP  |  Milestone 1</a:t>
+              <a:t>Sumukh Gupta, Neya Tripathi, Aditya Goel, Kushika Mishra  |  CSET346 NLP  |  Milestone 1</a:t>
             </a:r>
           </a:p>
         </p:txBody>
@@ -12070,7 +12160,7 @@
                 <a:latin typeface="Calibri"/>
                 <a:cs typeface="Nirmala UI"/>
               </a:rPr>
-              <a:t>Sumukh Gupta  |  S24CSEU0570  |  CSET346 NLP  |  Milestone 1</a:t>
+              <a:t>Sumukh Gupta, Neya Tripathi, Aditya Goel, Kushika Mishra  |  CSET346 NLP  |  Milestone 1</a:t>
             </a:r>
           </a:p>
         </p:txBody>
@@ -12776,7 +12866,7 @@
                 <a:latin typeface="Calibri"/>
                 <a:cs typeface="Nirmala UI"/>
               </a:rPr>
-              <a:t>Sumukh Gupta  |  S24CSEU0570  |  CSET346 NLP  |  Milestone 1</a:t>
+              <a:t>Sumukh Gupta, Neya Tripathi, Aditya Goel, Kushika Mishra  |  CSET346 NLP  |  Milestone 1</a:t>
             </a:r>
           </a:p>
         </p:txBody>
